--- a/Funnel Algorithm.pptx
+++ b/Funnel Algorithm.pptx
@@ -8,6 +8,16 @@
     <p:sldId id="256" r:id="rId2"/>
     <p:sldId id="257" r:id="rId3"/>
     <p:sldId id="258" r:id="rId4"/>
+    <p:sldId id="259" r:id="rId5"/>
+    <p:sldId id="260" r:id="rId6"/>
+    <p:sldId id="261" r:id="rId7"/>
+    <p:sldId id="262" r:id="rId8"/>
+    <p:sldId id="263" r:id="rId9"/>
+    <p:sldId id="264" r:id="rId10"/>
+    <p:sldId id="265" r:id="rId11"/>
+    <p:sldId id="266" r:id="rId12"/>
+    <p:sldId id="267" r:id="rId13"/>
+    <p:sldId id="268" r:id="rId14"/>
   </p:sldIdLst>
   <p:sldSz cx="12192000" cy="6858000"/>
   <p:notesSz cx="6858000" cy="9144000"/>
@@ -106,6 +116,11 @@
       </a:defRPr>
     </a:lvl9pPr>
   </p:defaultTextStyle>
+  <p:extLst>
+    <p:ext uri="{EFAFB233-063F-42B5-8137-9DF3F51BA10A}">
+      <p15:sldGuideLst xmlns:p15="http://schemas.microsoft.com/office/powerpoint/2012/main"/>
+    </p:ext>
+  </p:extLst>
 </p:presentation>
 </file>
 
@@ -3523,6 +3538,631 @@
 </p:sld>
 </file>
 
+<file path=ppt/slides/slide10.xml><?xml version="1.0" encoding="utf-8"?>
+<p:sld xmlns:a="http://schemas.openxmlformats.org/drawingml/2006/main" xmlns:r="http://schemas.openxmlformats.org/officeDocument/2006/relationships" xmlns:p="http://schemas.openxmlformats.org/presentationml/2006/main">
+  <p:cSld>
+    <p:spTree>
+      <p:nvGrpSpPr>
+        <p:cNvPr id="1" name="">
+          <a:extLst>
+            <a:ext uri="{FF2B5EF4-FFF2-40B4-BE49-F238E27FC236}">
+              <a16:creationId xmlns:a16="http://schemas.microsoft.com/office/drawing/2014/main" id="{FFB9021F-3481-8BB8-62CD-6B301B3E2779}"/>
+            </a:ext>
+          </a:extLst>
+        </p:cNvPr>
+        <p:cNvGrpSpPr/>
+        <p:nvPr/>
+      </p:nvGrpSpPr>
+      <p:grpSpPr>
+        <a:xfrm>
+          <a:off x="0" y="0"/>
+          <a:ext cx="0" cy="0"/>
+          <a:chOff x="0" y="0"/>
+          <a:chExt cx="0" cy="0"/>
+        </a:xfrm>
+      </p:grpSpPr>
+      <p:sp>
+        <p:nvSpPr>
+          <p:cNvPr id="2" name="Title 1">
+            <a:extLst>
+              <a:ext uri="{FF2B5EF4-FFF2-40B4-BE49-F238E27FC236}">
+                <a16:creationId xmlns:a16="http://schemas.microsoft.com/office/drawing/2014/main" id="{4F45672B-FA50-909E-4C27-A2EB47ACB183}"/>
+              </a:ext>
+            </a:extLst>
+          </p:cNvPr>
+          <p:cNvSpPr>
+            <a:spLocks noGrp="1"/>
+          </p:cNvSpPr>
+          <p:nvPr>
+            <p:ph type="title"/>
+          </p:nvPr>
+        </p:nvSpPr>
+        <p:spPr>
+          <a:xfrm>
+            <a:off x="1261872" y="365760"/>
+            <a:ext cx="7124746" cy="1325562"/>
+          </a:xfrm>
+        </p:spPr>
+        <p:txBody>
+          <a:bodyPr/>
+          <a:lstStyle/>
+          <a:p>
+            <a:r>
+              <a:rPr lang="sr-Latn-RS" dirty="0"/>
+              <a:t>Funnel algoritam - detalji</a:t>
+            </a:r>
+            <a:endParaRPr lang="en-US" dirty="0"/>
+          </a:p>
+        </p:txBody>
+      </p:sp>
+      <p:sp>
+        <p:nvSpPr>
+          <p:cNvPr id="3" name="Content Placeholder 2">
+            <a:extLst>
+              <a:ext uri="{FF2B5EF4-FFF2-40B4-BE49-F238E27FC236}">
+                <a16:creationId xmlns:a16="http://schemas.microsoft.com/office/drawing/2014/main" id="{3DA1CF6B-A12E-4F33-E206-E165E0B342B8}"/>
+              </a:ext>
+            </a:extLst>
+          </p:cNvPr>
+          <p:cNvSpPr>
+            <a:spLocks noGrp="1"/>
+          </p:cNvSpPr>
+          <p:nvPr>
+            <p:ph idx="1"/>
+          </p:nvPr>
+        </p:nvSpPr>
+        <p:spPr>
+          <a:xfrm>
+            <a:off x="1261872" y="1828800"/>
+            <a:ext cx="9415364" cy="4351337"/>
+          </a:xfrm>
+        </p:spPr>
+        <p:txBody>
+          <a:bodyPr/>
+          <a:lstStyle/>
+          <a:p>
+            <a:pPr marL="0" indent="0">
+              <a:buNone/>
+            </a:pPr>
+            <a:r>
+              <a:rPr lang="sr-Latn-RS" dirty="0"/>
+              <a:t>U svakom koraku algoritma: </a:t>
+            </a:r>
+          </a:p>
+          <a:p>
+            <a:r>
+              <a:rPr lang="sr-Latn-RS" dirty="0"/>
+              <a:t>1. Izaberemo sledeći portal</a:t>
+            </a:r>
+          </a:p>
+          <a:p>
+            <a:r>
+              <a:rPr lang="sr-Latn-RS" dirty="0"/>
+              <a:t>2. Ako portal s leve strane sužava funnel, onda update-ujemo levu stranu</a:t>
+            </a:r>
+          </a:p>
+          <a:p>
+            <a:r>
+              <a:rPr lang="sr-Latn-RS" dirty="0"/>
+              <a:t>3. Ako leva strana prelazi desnu, onda znamo da je desna strana deo puta – našli smo novi apex i resetujemo funnel</a:t>
+            </a:r>
+          </a:p>
+          <a:p>
+            <a:r>
+              <a:rPr lang="sr-Latn-RS" dirty="0"/>
+              <a:t>4. Ako portal s desne strane sužava funnel, onda update-ujemo desnu stranu</a:t>
+            </a:r>
+          </a:p>
+          <a:p>
+            <a:r>
+              <a:rPr lang="sr-Latn-RS" dirty="0"/>
+              <a:t>Ako desna strana prelazi levu, onda znamo da je leva strana deo puta – našli smo novi apex i resetujemo funnel</a:t>
+            </a:r>
+          </a:p>
+          <a:p>
+            <a:r>
+              <a:rPr lang="sr-Latn-RS" dirty="0"/>
+              <a:t>Ako je pronađen apex tačka B onda smo pronašli konačan put</a:t>
+            </a:r>
+          </a:p>
+          <a:p>
+            <a:pPr marL="0" indent="0">
+              <a:buNone/>
+            </a:pPr>
+            <a:endParaRPr lang="en-US" dirty="0"/>
+          </a:p>
+        </p:txBody>
+      </p:sp>
+    </p:spTree>
+    <p:extLst>
+      <p:ext uri="{BB962C8B-B14F-4D97-AF65-F5344CB8AC3E}">
+        <p14:creationId xmlns:p14="http://schemas.microsoft.com/office/powerpoint/2010/main" val="2656263321"/>
+      </p:ext>
+    </p:extLst>
+  </p:cSld>
+  <p:clrMapOvr>
+    <a:masterClrMapping/>
+  </p:clrMapOvr>
+</p:sld>
+</file>
+
+<file path=ppt/slides/slide11.xml><?xml version="1.0" encoding="utf-8"?>
+<p:sld xmlns:a="http://schemas.openxmlformats.org/drawingml/2006/main" xmlns:r="http://schemas.openxmlformats.org/officeDocument/2006/relationships" xmlns:p="http://schemas.openxmlformats.org/presentationml/2006/main">
+  <p:cSld>
+    <p:spTree>
+      <p:nvGrpSpPr>
+        <p:cNvPr id="1" name=""/>
+        <p:cNvGrpSpPr/>
+        <p:nvPr/>
+      </p:nvGrpSpPr>
+      <p:grpSpPr>
+        <a:xfrm>
+          <a:off x="0" y="0"/>
+          <a:ext cx="0" cy="0"/>
+          <a:chOff x="0" y="0"/>
+          <a:chExt cx="0" cy="0"/>
+        </a:xfrm>
+      </p:grpSpPr>
+      <p:sp>
+        <p:nvSpPr>
+          <p:cNvPr id="2" name="Title 1">
+            <a:extLst>
+              <a:ext uri="{FF2B5EF4-FFF2-40B4-BE49-F238E27FC236}">
+                <a16:creationId xmlns:a16="http://schemas.microsoft.com/office/drawing/2014/main" id="{50755624-9C38-25AB-562F-1078F1E10B81}"/>
+              </a:ext>
+            </a:extLst>
+          </p:cNvPr>
+          <p:cNvSpPr>
+            <a:spLocks noGrp="1"/>
+          </p:cNvSpPr>
+          <p:nvPr>
+            <p:ph type="title"/>
+          </p:nvPr>
+        </p:nvSpPr>
+        <p:spPr/>
+        <p:txBody>
+          <a:bodyPr/>
+          <a:lstStyle/>
+          <a:p>
+            <a:r>
+              <a:rPr lang="sr-Latn-RS" dirty="0"/>
+              <a:t>Vremenska složenost</a:t>
+            </a:r>
+            <a:endParaRPr lang="en-US" dirty="0"/>
+          </a:p>
+        </p:txBody>
+      </p:sp>
+      <p:sp>
+        <p:nvSpPr>
+          <p:cNvPr id="3" name="Content Placeholder 2">
+            <a:extLst>
+              <a:ext uri="{FF2B5EF4-FFF2-40B4-BE49-F238E27FC236}">
+                <a16:creationId xmlns:a16="http://schemas.microsoft.com/office/drawing/2014/main" id="{598D4035-08EC-C5E5-A8EE-EDA73F8C3C96}"/>
+              </a:ext>
+            </a:extLst>
+          </p:cNvPr>
+          <p:cNvSpPr>
+            <a:spLocks noGrp="1"/>
+          </p:cNvSpPr>
+          <p:nvPr>
+            <p:ph idx="1"/>
+          </p:nvPr>
+        </p:nvSpPr>
+        <p:spPr/>
+        <p:txBody>
+          <a:bodyPr/>
+          <a:lstStyle/>
+          <a:p>
+            <a:pPr marL="0" indent="0">
+              <a:buNone/>
+            </a:pPr>
+            <a:r>
+              <a:rPr lang="sr-Latn-RS" dirty="0"/>
+              <a:t>Imamo:</a:t>
+            </a:r>
+          </a:p>
+          <a:p>
+            <a:r>
+              <a:rPr lang="sr-Latn-RS" dirty="0"/>
+              <a:t>N – broj temena u poligonu P</a:t>
+            </a:r>
+          </a:p>
+          <a:p>
+            <a:r>
+              <a:rPr lang="sr-Latn-RS" dirty="0"/>
+              <a:t>T – proj trouglova nakon triangulacije. Pošto smo koristili ear clipping, ovo je jednako N-2</a:t>
+            </a:r>
+          </a:p>
+          <a:p>
+            <a:r>
+              <a:rPr lang="sr-Latn-RS" dirty="0"/>
+              <a:t>E – proj deljenih ivica trouglova. Pošto je graf stablo ovo je jednako T-1, odnosno N-3</a:t>
+            </a:r>
+          </a:p>
+          <a:p>
+            <a:pPr marL="0" indent="0">
+              <a:buNone/>
+            </a:pPr>
+            <a:r>
+              <a:rPr lang="sr-Latn-RS" dirty="0"/>
+              <a:t>Možemo T i E da tretiramo nao N</a:t>
+            </a:r>
+            <a:endParaRPr lang="en-US" dirty="0"/>
+          </a:p>
+        </p:txBody>
+      </p:sp>
+    </p:spTree>
+    <p:extLst>
+      <p:ext uri="{BB962C8B-B14F-4D97-AF65-F5344CB8AC3E}">
+        <p14:creationId xmlns:p14="http://schemas.microsoft.com/office/powerpoint/2010/main" val="3152303732"/>
+      </p:ext>
+    </p:extLst>
+  </p:cSld>
+  <p:clrMapOvr>
+    <a:masterClrMapping/>
+  </p:clrMapOvr>
+</p:sld>
+</file>
+
+<file path=ppt/slides/slide12.xml><?xml version="1.0" encoding="utf-8"?>
+<p:sld xmlns:a="http://schemas.openxmlformats.org/drawingml/2006/main" xmlns:r="http://schemas.openxmlformats.org/officeDocument/2006/relationships" xmlns:p="http://schemas.openxmlformats.org/presentationml/2006/main">
+  <p:cSld>
+    <p:spTree>
+      <p:nvGrpSpPr>
+        <p:cNvPr id="1" name="">
+          <a:extLst>
+            <a:ext uri="{FF2B5EF4-FFF2-40B4-BE49-F238E27FC236}">
+              <a16:creationId xmlns:a16="http://schemas.microsoft.com/office/drawing/2014/main" id="{B0624BE8-B52F-363D-7753-E14D9C5FD677}"/>
+            </a:ext>
+          </a:extLst>
+        </p:cNvPr>
+        <p:cNvGrpSpPr/>
+        <p:nvPr/>
+      </p:nvGrpSpPr>
+      <p:grpSpPr>
+        <a:xfrm>
+          <a:off x="0" y="0"/>
+          <a:ext cx="0" cy="0"/>
+          <a:chOff x="0" y="0"/>
+          <a:chExt cx="0" cy="0"/>
+        </a:xfrm>
+      </p:grpSpPr>
+      <p:sp>
+        <p:nvSpPr>
+          <p:cNvPr id="2" name="Title 1">
+            <a:extLst>
+              <a:ext uri="{FF2B5EF4-FFF2-40B4-BE49-F238E27FC236}">
+                <a16:creationId xmlns:a16="http://schemas.microsoft.com/office/drawing/2014/main" id="{F2A97AE0-B4F7-8DF1-53B3-F7329D5CF688}"/>
+              </a:ext>
+            </a:extLst>
+          </p:cNvPr>
+          <p:cNvSpPr>
+            <a:spLocks noGrp="1"/>
+          </p:cNvSpPr>
+          <p:nvPr>
+            <p:ph type="title"/>
+          </p:nvPr>
+        </p:nvSpPr>
+        <p:spPr/>
+        <p:txBody>
+          <a:bodyPr/>
+          <a:lstStyle/>
+          <a:p>
+            <a:r>
+              <a:rPr lang="sr-Latn-RS" dirty="0"/>
+              <a:t>Vremenska složenost</a:t>
+            </a:r>
+            <a:endParaRPr lang="en-US" dirty="0"/>
+          </a:p>
+        </p:txBody>
+      </p:sp>
+      <p:sp>
+        <p:nvSpPr>
+          <p:cNvPr id="3" name="Content Placeholder 2">
+            <a:extLst>
+              <a:ext uri="{FF2B5EF4-FFF2-40B4-BE49-F238E27FC236}">
+                <a16:creationId xmlns:a16="http://schemas.microsoft.com/office/drawing/2014/main" id="{9AFD5B7A-1CC4-233C-ED7A-6C4028EE14B3}"/>
+              </a:ext>
+            </a:extLst>
+          </p:cNvPr>
+          <p:cNvSpPr>
+            <a:spLocks noGrp="1"/>
+          </p:cNvSpPr>
+          <p:nvPr>
+            <p:ph idx="1"/>
+          </p:nvPr>
+        </p:nvSpPr>
+        <p:spPr/>
+        <p:txBody>
+          <a:bodyPr/>
+          <a:lstStyle/>
+          <a:p>
+            <a:pPr marL="0" indent="0">
+              <a:buNone/>
+            </a:pPr>
+            <a:r>
+              <a:rPr lang="sr-Latn-RS" dirty="0"/>
+              <a:t>Učitavanje poligona:</a:t>
+            </a:r>
+          </a:p>
+          <a:p>
+            <a:r>
+              <a:rPr lang="sr-Latn-RS" dirty="0"/>
+              <a:t>T </a:t>
+            </a:r>
+            <a:r>
+              <a:rPr lang="en-US" dirty="0"/>
+              <a:t>= O(N^2) – U</a:t>
+            </a:r>
+            <a:r>
+              <a:rPr lang="sr-Latn-RS" dirty="0"/>
+              <a:t>čitavanje je inače O(N), ali aplikacija automatski radi triangulaciju pri učitavanju, što je u najgorem slučaju </a:t>
+            </a:r>
+            <a:r>
+              <a:rPr lang="en-US" dirty="0"/>
+              <a:t>O(N^2)</a:t>
+            </a:r>
+            <a:endParaRPr lang="sr-Latn-RS" dirty="0"/>
+          </a:p>
+          <a:p>
+            <a:r>
+              <a:rPr lang="sr-Latn-RS" dirty="0"/>
+              <a:t>M </a:t>
+            </a:r>
+            <a:r>
+              <a:rPr lang="en-US" dirty="0"/>
+              <a:t>= O(N) – </a:t>
+            </a:r>
+            <a:r>
+              <a:rPr lang="sr-Latn-RS" dirty="0"/>
+              <a:t>čuvamo poligon i trouglove</a:t>
+            </a:r>
+          </a:p>
+          <a:p>
+            <a:pPr marL="0" indent="0">
+              <a:buNone/>
+            </a:pPr>
+            <a:r>
+              <a:rPr lang="sr-Latn-RS" dirty="0"/>
+              <a:t>Nalaženje puta:</a:t>
+            </a:r>
+          </a:p>
+          <a:p>
+            <a:r>
+              <a:rPr lang="sr-Latn-RS" dirty="0"/>
+              <a:t>T </a:t>
+            </a:r>
+            <a:r>
+              <a:rPr lang="en-US" dirty="0"/>
+              <a:t>= O(N)</a:t>
+            </a:r>
+            <a:r>
+              <a:rPr lang="sr-Latn-RS" dirty="0"/>
+              <a:t> – pravljenje grafa je </a:t>
+            </a:r>
+            <a:r>
+              <a:rPr lang="en-US" dirty="0"/>
+              <a:t>O(N)</a:t>
+            </a:r>
+            <a:r>
+              <a:rPr lang="sr-Latn-RS" dirty="0"/>
+              <a:t>, bfs je </a:t>
+            </a:r>
+            <a:r>
+              <a:rPr lang="en-US" dirty="0"/>
+              <a:t>O(N)</a:t>
+            </a:r>
+            <a:r>
+              <a:rPr lang="sr-Latn-RS" dirty="0"/>
+              <a:t>, funnel algoritam je </a:t>
+            </a:r>
+            <a:r>
+              <a:rPr lang="en-US" dirty="0"/>
+              <a:t>O(N)</a:t>
+            </a:r>
+            <a:r>
+              <a:rPr lang="sr-Latn-RS" dirty="0"/>
+              <a:t>.</a:t>
+            </a:r>
+          </a:p>
+          <a:p>
+            <a:r>
+              <a:rPr lang="sr-Latn-RS" dirty="0"/>
+              <a:t>M </a:t>
+            </a:r>
+            <a:r>
+              <a:rPr lang="en-US" dirty="0"/>
+              <a:t>= O(N) – </a:t>
+            </a:r>
+            <a:r>
+              <a:rPr lang="en-US" dirty="0" err="1"/>
+              <a:t>pravljenje</a:t>
+            </a:r>
+            <a:r>
+              <a:rPr lang="en-US" dirty="0"/>
+              <a:t> </a:t>
+            </a:r>
+            <a:r>
+              <a:rPr lang="en-US" dirty="0" err="1"/>
+              <a:t>grafikona</a:t>
+            </a:r>
+            <a:r>
+              <a:rPr lang="en-US" dirty="0"/>
+              <a:t>, </a:t>
+            </a:r>
+            <a:r>
+              <a:rPr lang="en-US" dirty="0" err="1"/>
+              <a:t>niza</a:t>
+            </a:r>
+            <a:r>
+              <a:rPr lang="en-US" dirty="0"/>
+              <a:t> </a:t>
+            </a:r>
+            <a:r>
+              <a:rPr lang="en-US" dirty="0" err="1"/>
+              <a:t>trouglova</a:t>
+            </a:r>
+            <a:r>
+              <a:rPr lang="en-US" dirty="0"/>
+              <a:t> i </a:t>
+            </a:r>
+            <a:r>
+              <a:rPr lang="en-US" dirty="0" err="1"/>
+              <a:t>niza</a:t>
+            </a:r>
+            <a:r>
+              <a:rPr lang="en-US" dirty="0"/>
+              <a:t> </a:t>
+            </a:r>
+            <a:r>
+              <a:rPr lang="en-US" dirty="0" err="1"/>
+              <a:t>portala</a:t>
+            </a:r>
+            <a:endParaRPr lang="en-US" dirty="0"/>
+          </a:p>
+        </p:txBody>
+      </p:sp>
+    </p:spTree>
+    <p:extLst>
+      <p:ext uri="{BB962C8B-B14F-4D97-AF65-F5344CB8AC3E}">
+        <p14:creationId xmlns:p14="http://schemas.microsoft.com/office/powerpoint/2010/main" val="1193653304"/>
+      </p:ext>
+    </p:extLst>
+  </p:cSld>
+  <p:clrMapOvr>
+    <a:masterClrMapping/>
+  </p:clrMapOvr>
+</p:sld>
+</file>
+
+<file path=ppt/slides/slide13.xml><?xml version="1.0" encoding="utf-8"?>
+<p:sld xmlns:a="http://schemas.openxmlformats.org/drawingml/2006/main" xmlns:r="http://schemas.openxmlformats.org/officeDocument/2006/relationships" xmlns:p="http://schemas.openxmlformats.org/presentationml/2006/main">
+  <p:cSld>
+    <p:spTree>
+      <p:nvGrpSpPr>
+        <p:cNvPr id="1" name=""/>
+        <p:cNvGrpSpPr/>
+        <p:nvPr/>
+      </p:nvGrpSpPr>
+      <p:grpSpPr>
+        <a:xfrm>
+          <a:off x="0" y="0"/>
+          <a:ext cx="0" cy="0"/>
+          <a:chOff x="0" y="0"/>
+          <a:chExt cx="0" cy="0"/>
+        </a:xfrm>
+      </p:grpSpPr>
+      <p:sp>
+        <p:nvSpPr>
+          <p:cNvPr id="2" name="Title 1">
+            <a:extLst>
+              <a:ext uri="{FF2B5EF4-FFF2-40B4-BE49-F238E27FC236}">
+                <a16:creationId xmlns:a16="http://schemas.microsoft.com/office/drawing/2014/main" id="{1C52786A-FCA8-AA64-355D-B36AF1625165}"/>
+              </a:ext>
+            </a:extLst>
+          </p:cNvPr>
+          <p:cNvSpPr>
+            <a:spLocks noGrp="1"/>
+          </p:cNvSpPr>
+          <p:nvPr>
+            <p:ph type="title"/>
+          </p:nvPr>
+        </p:nvSpPr>
+        <p:spPr/>
+        <p:txBody>
+          <a:bodyPr/>
+          <a:lstStyle/>
+          <a:p>
+            <a:r>
+              <a:rPr lang="en-US" dirty="0" err="1"/>
+              <a:t>Aplikacija</a:t>
+            </a:r>
+            <a:endParaRPr lang="en-US" dirty="0"/>
+          </a:p>
+        </p:txBody>
+      </p:sp>
+      <p:sp>
+        <p:nvSpPr>
+          <p:cNvPr id="3" name="Content Placeholder 2">
+            <a:extLst>
+              <a:ext uri="{FF2B5EF4-FFF2-40B4-BE49-F238E27FC236}">
+                <a16:creationId xmlns:a16="http://schemas.microsoft.com/office/drawing/2014/main" id="{434A1144-AC93-CED1-8065-FBCEBD08FC4A}"/>
+              </a:ext>
+            </a:extLst>
+          </p:cNvPr>
+          <p:cNvSpPr>
+            <a:spLocks noGrp="1"/>
+          </p:cNvSpPr>
+          <p:nvPr>
+            <p:ph idx="1"/>
+          </p:nvPr>
+        </p:nvSpPr>
+        <p:spPr/>
+        <p:txBody>
+          <a:bodyPr/>
+          <a:lstStyle/>
+          <a:p>
+            <a:r>
+              <a:rPr lang="en-US" dirty="0" err="1"/>
+              <a:t>Aplikacija</a:t>
+            </a:r>
+            <a:r>
+              <a:rPr lang="en-US" dirty="0"/>
+              <a:t> </a:t>
+            </a:r>
+            <a:r>
+              <a:rPr lang="sr-Latn-RS" dirty="0"/>
+              <a:t>može da učitava primere iz fajla i pruži nam solidnu vizuelizaciju algoritma. Kontrole aplikacije su sledeće:</a:t>
+            </a:r>
+          </a:p>
+          <a:p>
+            <a:r>
+              <a:rPr lang="sr-Latn-RS" dirty="0"/>
+              <a:t>R – novi primer: Uzima random poligon i pravi tačke A i B unutar njega nasumično</a:t>
+            </a:r>
+          </a:p>
+          <a:p>
+            <a:pPr marL="0" indent="0">
+              <a:buNone/>
+            </a:pPr>
+            <a:r>
+              <a:rPr lang="sr-Latn-RS" dirty="0"/>
+              <a:t>Ako nismo započeli algoritam, levim i desnim klikom se mogu promeniti gde se nalaze tačke A i B.</a:t>
+            </a:r>
+          </a:p>
+          <a:p>
+            <a:r>
+              <a:rPr lang="sr-Latn-RS" dirty="0"/>
+              <a:t>Leva i desna strelica – šaltanje primera</a:t>
+            </a:r>
+          </a:p>
+          <a:p>
+            <a:r>
+              <a:rPr lang="sr-Latn-RS" dirty="0"/>
+              <a:t>Enter – veliki korak: odmah se odradi trenutni korak/algoritam</a:t>
+            </a:r>
+          </a:p>
+          <a:p>
+            <a:r>
+              <a:rPr lang="sr-Latn-RS" dirty="0"/>
+              <a:t>F – mali korak: odradi se trenutni korak ili sledeća iteracija trenutnog algoritma. Može se držati</a:t>
+            </a:r>
+          </a:p>
+        </p:txBody>
+      </p:sp>
+    </p:spTree>
+    <p:extLst>
+      <p:ext uri="{BB962C8B-B14F-4D97-AF65-F5344CB8AC3E}">
+        <p14:creationId xmlns:p14="http://schemas.microsoft.com/office/powerpoint/2010/main" val="102535477"/>
+      </p:ext>
+    </p:extLst>
+  </p:cSld>
+  <p:clrMapOvr>
+    <a:masterClrMapping/>
+  </p:clrMapOvr>
+</p:sld>
+</file>
+
 <file path=ppt/slides/slide2.xml><?xml version="1.0" encoding="utf-8"?>
 <p:sld xmlns:a="http://schemas.openxmlformats.org/drawingml/2006/main" xmlns:r="http://schemas.openxmlformats.org/officeDocument/2006/relationships" xmlns:p="http://schemas.openxmlformats.org/presentationml/2006/main">
   <p:cSld>
@@ -3797,19 +4437,1132 @@
             <p:ph idx="1"/>
           </p:nvPr>
         </p:nvSpPr>
-        <p:spPr/>
-        <p:txBody>
-          <a:bodyPr/>
-          <a:lstStyle/>
-          <a:p>
+        <p:spPr>
+          <a:xfrm>
+            <a:off x="1261872" y="1828800"/>
+            <a:ext cx="4345709" cy="4351337"/>
+          </a:xfrm>
+        </p:spPr>
+        <p:txBody>
+          <a:bodyPr/>
+          <a:lstStyle/>
+          <a:p>
+            <a:r>
+              <a:rPr lang="en-US" dirty="0"/>
+              <a:t>1. </a:t>
+            </a:r>
+            <a:r>
+              <a:rPr lang="en-US" dirty="0" err="1"/>
+              <a:t>Triangulacija</a:t>
+            </a:r>
+            <a:r>
+              <a:rPr lang="en-US" dirty="0"/>
+              <a:t> – </a:t>
+            </a:r>
+            <a:r>
+              <a:rPr lang="en-US" dirty="0" err="1"/>
+              <a:t>Prvo</a:t>
+            </a:r>
+            <a:r>
+              <a:rPr lang="en-US" dirty="0"/>
+              <a:t> </a:t>
+            </a:r>
+            <a:r>
+              <a:rPr lang="en-US" dirty="0" err="1"/>
+              <a:t>radimo</a:t>
+            </a:r>
+            <a:r>
+              <a:rPr lang="en-US" dirty="0"/>
+              <a:t> </a:t>
+            </a:r>
+            <a:r>
+              <a:rPr lang="en-US" dirty="0" err="1"/>
+              <a:t>triangulaciju</a:t>
+            </a:r>
+            <a:r>
+              <a:rPr lang="en-US" dirty="0"/>
+              <a:t> </a:t>
+            </a:r>
+            <a:r>
+              <a:rPr lang="en-US" dirty="0" err="1"/>
+              <a:t>nad</a:t>
+            </a:r>
+            <a:r>
+              <a:rPr lang="en-US" dirty="0"/>
+              <a:t> </a:t>
+            </a:r>
+            <a:r>
+              <a:rPr lang="en-US" dirty="0" err="1"/>
+              <a:t>poligonom</a:t>
+            </a:r>
+            <a:r>
+              <a:rPr lang="en-US" dirty="0"/>
+              <a:t>, pod </a:t>
+            </a:r>
+            <a:r>
+              <a:rPr lang="en-US" dirty="0" err="1"/>
+              <a:t>uslovom</a:t>
+            </a:r>
+            <a:r>
+              <a:rPr lang="en-US" dirty="0"/>
+              <a:t> da on ne </a:t>
+            </a:r>
+            <a:r>
+              <a:rPr lang="en-US" dirty="0" err="1"/>
+              <a:t>stvara</a:t>
+            </a:r>
+            <a:r>
+              <a:rPr lang="en-US" dirty="0"/>
+              <a:t> </a:t>
+            </a:r>
+            <a:r>
+              <a:rPr lang="en-US" dirty="0" err="1"/>
+              <a:t>nove</a:t>
+            </a:r>
+            <a:r>
+              <a:rPr lang="en-US" dirty="0"/>
+              <a:t> vertex-e</a:t>
+            </a:r>
+          </a:p>
+          <a:p>
+            <a:r>
+              <a:rPr lang="en-US" dirty="0" err="1"/>
+              <a:t>Zbog</a:t>
+            </a:r>
+            <a:r>
+              <a:rPr lang="en-US" dirty="0"/>
+              <a:t> toga </a:t>
+            </a:r>
+            <a:r>
+              <a:rPr lang="en-US" dirty="0" err="1"/>
+              <a:t>koristimo</a:t>
+            </a:r>
+            <a:r>
+              <a:rPr lang="en-US" dirty="0"/>
+              <a:t> ear clipping </a:t>
+            </a:r>
+            <a:r>
+              <a:rPr lang="en-US" dirty="0" err="1"/>
+              <a:t>algoritam</a:t>
+            </a:r>
             <a:endParaRPr lang="en-US" dirty="0"/>
           </a:p>
         </p:txBody>
       </p:sp>
+      <p:pic>
+        <p:nvPicPr>
+          <p:cNvPr id="5" name="Picture 4">
+            <a:extLst>
+              <a:ext uri="{FF2B5EF4-FFF2-40B4-BE49-F238E27FC236}">
+                <a16:creationId xmlns:a16="http://schemas.microsoft.com/office/drawing/2014/main" id="{797F9982-5640-9BB9-6E70-729D5AA8C195}"/>
+              </a:ext>
+            </a:extLst>
+          </p:cNvPr>
+          <p:cNvPicPr>
+            <a:picLocks noChangeAspect="1"/>
+          </p:cNvPicPr>
+          <p:nvPr/>
+        </p:nvPicPr>
+        <p:blipFill>
+          <a:blip r:embed="rId2">
+            <a:extLst>
+              <a:ext uri="{28A0092B-C50C-407E-A947-70E740481C1C}">
+                <a14:useLocalDpi xmlns:a14="http://schemas.microsoft.com/office/drawing/2010/main" val="0"/>
+              </a:ext>
+            </a:extLst>
+          </a:blip>
+          <a:stretch>
+            <a:fillRect/>
+          </a:stretch>
+        </p:blipFill>
+        <p:spPr>
+          <a:xfrm>
+            <a:off x="5529934" y="1032163"/>
+            <a:ext cx="5326303" cy="4793673"/>
+          </a:xfrm>
+          <a:prstGeom prst="rect">
+            <a:avLst/>
+          </a:prstGeom>
+        </p:spPr>
+      </p:pic>
     </p:spTree>
     <p:extLst>
       <p:ext uri="{BB962C8B-B14F-4D97-AF65-F5344CB8AC3E}">
         <p14:creationId xmlns:p14="http://schemas.microsoft.com/office/powerpoint/2010/main" val="953539390"/>
+      </p:ext>
+    </p:extLst>
+  </p:cSld>
+  <p:clrMapOvr>
+    <a:masterClrMapping/>
+  </p:clrMapOvr>
+</p:sld>
+</file>
+
+<file path=ppt/slides/slide4.xml><?xml version="1.0" encoding="utf-8"?>
+<p:sld xmlns:a="http://schemas.openxmlformats.org/drawingml/2006/main" xmlns:r="http://schemas.openxmlformats.org/officeDocument/2006/relationships" xmlns:p="http://schemas.openxmlformats.org/presentationml/2006/main">
+  <p:cSld>
+    <p:spTree>
+      <p:nvGrpSpPr>
+        <p:cNvPr id="1" name="">
+          <a:extLst>
+            <a:ext uri="{FF2B5EF4-FFF2-40B4-BE49-F238E27FC236}">
+              <a16:creationId xmlns:a16="http://schemas.microsoft.com/office/drawing/2014/main" id="{825172ED-049F-9A93-F6BF-A3C4FB3E3E39}"/>
+            </a:ext>
+          </a:extLst>
+        </p:cNvPr>
+        <p:cNvGrpSpPr/>
+        <p:nvPr/>
+      </p:nvGrpSpPr>
+      <p:grpSpPr>
+        <a:xfrm>
+          <a:off x="0" y="0"/>
+          <a:ext cx="0" cy="0"/>
+          <a:chOff x="0" y="0"/>
+          <a:chExt cx="0" cy="0"/>
+        </a:xfrm>
+      </p:grpSpPr>
+      <p:sp>
+        <p:nvSpPr>
+          <p:cNvPr id="2" name="Title 1">
+            <a:extLst>
+              <a:ext uri="{FF2B5EF4-FFF2-40B4-BE49-F238E27FC236}">
+                <a16:creationId xmlns:a16="http://schemas.microsoft.com/office/drawing/2014/main" id="{251BA277-1363-2379-EAA9-23784AC73089}"/>
+              </a:ext>
+            </a:extLst>
+          </p:cNvPr>
+          <p:cNvSpPr>
+            <a:spLocks noGrp="1"/>
+          </p:cNvSpPr>
+          <p:nvPr>
+            <p:ph type="title"/>
+          </p:nvPr>
+        </p:nvSpPr>
+        <p:spPr/>
+        <p:txBody>
+          <a:bodyPr/>
+          <a:lstStyle/>
+          <a:p>
+            <a:r>
+              <a:rPr lang="en-US" dirty="0"/>
+              <a:t>Re</a:t>
+            </a:r>
+            <a:r>
+              <a:rPr lang="sr-Latn-RS" dirty="0"/>
+              <a:t>šenje</a:t>
+            </a:r>
+            <a:endParaRPr lang="en-US" dirty="0"/>
+          </a:p>
+        </p:txBody>
+      </p:sp>
+      <p:sp>
+        <p:nvSpPr>
+          <p:cNvPr id="3" name="Content Placeholder 2">
+            <a:extLst>
+              <a:ext uri="{FF2B5EF4-FFF2-40B4-BE49-F238E27FC236}">
+                <a16:creationId xmlns:a16="http://schemas.microsoft.com/office/drawing/2014/main" id="{546713AD-8A5C-6930-E245-146646F84557}"/>
+              </a:ext>
+            </a:extLst>
+          </p:cNvPr>
+          <p:cNvSpPr>
+            <a:spLocks noGrp="1"/>
+          </p:cNvSpPr>
+          <p:nvPr>
+            <p:ph idx="1"/>
+          </p:nvPr>
+        </p:nvSpPr>
+        <p:spPr>
+          <a:xfrm>
+            <a:off x="1261872" y="1828800"/>
+            <a:ext cx="4335364" cy="4351337"/>
+          </a:xfrm>
+        </p:spPr>
+        <p:txBody>
+          <a:bodyPr/>
+          <a:lstStyle/>
+          <a:p>
+            <a:r>
+              <a:rPr lang="sr-Latn-RS" dirty="0"/>
+              <a:t>2. Kreiranje grafa – svaki trougao je node i svaka deljena stranica između njih je edge</a:t>
+            </a:r>
+          </a:p>
+          <a:p>
+            <a:r>
+              <a:rPr lang="sr-Latn-RS" dirty="0"/>
+              <a:t>Pošto smo koristili ear clipping, garantovano je da će ovaj graf biti stablo i neće imati cikluse</a:t>
+            </a:r>
+            <a:endParaRPr lang="en-US" dirty="0"/>
+          </a:p>
+        </p:txBody>
+      </p:sp>
+      <p:pic>
+        <p:nvPicPr>
+          <p:cNvPr id="5" name="Picture 4">
+            <a:extLst>
+              <a:ext uri="{FF2B5EF4-FFF2-40B4-BE49-F238E27FC236}">
+                <a16:creationId xmlns:a16="http://schemas.microsoft.com/office/drawing/2014/main" id="{B35D5A46-1984-13CF-1606-39900F9031ED}"/>
+              </a:ext>
+            </a:extLst>
+          </p:cNvPr>
+          <p:cNvPicPr>
+            <a:picLocks noChangeAspect="1"/>
+          </p:cNvPicPr>
+          <p:nvPr/>
+        </p:nvPicPr>
+        <p:blipFill>
+          <a:blip r:embed="rId2">
+            <a:extLst>
+              <a:ext uri="{28A0092B-C50C-407E-A947-70E740481C1C}">
+                <a14:useLocalDpi xmlns:a14="http://schemas.microsoft.com/office/drawing/2010/main" val="0"/>
+              </a:ext>
+            </a:extLst>
+          </a:blip>
+          <a:stretch>
+            <a:fillRect/>
+          </a:stretch>
+        </p:blipFill>
+        <p:spPr>
+          <a:xfrm>
+            <a:off x="5749637" y="1041400"/>
+            <a:ext cx="5305778" cy="4775200"/>
+          </a:xfrm>
+          <a:prstGeom prst="rect">
+            <a:avLst/>
+          </a:prstGeom>
+        </p:spPr>
+      </p:pic>
+    </p:spTree>
+    <p:extLst>
+      <p:ext uri="{BB962C8B-B14F-4D97-AF65-F5344CB8AC3E}">
+        <p14:creationId xmlns:p14="http://schemas.microsoft.com/office/powerpoint/2010/main" val="92438124"/>
+      </p:ext>
+    </p:extLst>
+  </p:cSld>
+  <p:clrMapOvr>
+    <a:masterClrMapping/>
+  </p:clrMapOvr>
+</p:sld>
+</file>
+
+<file path=ppt/slides/slide5.xml><?xml version="1.0" encoding="utf-8"?>
+<p:sld xmlns:a="http://schemas.openxmlformats.org/drawingml/2006/main" xmlns:r="http://schemas.openxmlformats.org/officeDocument/2006/relationships" xmlns:p="http://schemas.openxmlformats.org/presentationml/2006/main">
+  <p:cSld>
+    <p:spTree>
+      <p:nvGrpSpPr>
+        <p:cNvPr id="1" name="">
+          <a:extLst>
+            <a:ext uri="{FF2B5EF4-FFF2-40B4-BE49-F238E27FC236}">
+              <a16:creationId xmlns:a16="http://schemas.microsoft.com/office/drawing/2014/main" id="{FFA1628F-EC32-32E8-D995-4A5921B27C5A}"/>
+            </a:ext>
+          </a:extLst>
+        </p:cNvPr>
+        <p:cNvGrpSpPr/>
+        <p:nvPr/>
+      </p:nvGrpSpPr>
+      <p:grpSpPr>
+        <a:xfrm>
+          <a:off x="0" y="0"/>
+          <a:ext cx="0" cy="0"/>
+          <a:chOff x="0" y="0"/>
+          <a:chExt cx="0" cy="0"/>
+        </a:xfrm>
+      </p:grpSpPr>
+      <p:sp>
+        <p:nvSpPr>
+          <p:cNvPr id="2" name="Title 1">
+            <a:extLst>
+              <a:ext uri="{FF2B5EF4-FFF2-40B4-BE49-F238E27FC236}">
+                <a16:creationId xmlns:a16="http://schemas.microsoft.com/office/drawing/2014/main" id="{F677128B-B30E-0542-189F-D38FB15223C6}"/>
+              </a:ext>
+            </a:extLst>
+          </p:cNvPr>
+          <p:cNvSpPr>
+            <a:spLocks noGrp="1"/>
+          </p:cNvSpPr>
+          <p:nvPr>
+            <p:ph type="title"/>
+          </p:nvPr>
+        </p:nvSpPr>
+        <p:spPr/>
+        <p:txBody>
+          <a:bodyPr/>
+          <a:lstStyle/>
+          <a:p>
+            <a:r>
+              <a:rPr lang="en-US" dirty="0"/>
+              <a:t>Re</a:t>
+            </a:r>
+            <a:r>
+              <a:rPr lang="sr-Latn-RS" dirty="0"/>
+              <a:t>šenje</a:t>
+            </a:r>
+            <a:endParaRPr lang="en-US" dirty="0"/>
+          </a:p>
+        </p:txBody>
+      </p:sp>
+      <p:sp>
+        <p:nvSpPr>
+          <p:cNvPr id="3" name="Content Placeholder 2">
+            <a:extLst>
+              <a:ext uri="{FF2B5EF4-FFF2-40B4-BE49-F238E27FC236}">
+                <a16:creationId xmlns:a16="http://schemas.microsoft.com/office/drawing/2014/main" id="{A3D36BDA-D657-6964-F913-8A683CD0D72C}"/>
+              </a:ext>
+            </a:extLst>
+          </p:cNvPr>
+          <p:cNvSpPr>
+            <a:spLocks noGrp="1"/>
+          </p:cNvSpPr>
+          <p:nvPr>
+            <p:ph idx="1"/>
+          </p:nvPr>
+        </p:nvSpPr>
+        <p:spPr>
+          <a:xfrm>
+            <a:off x="1261872" y="1828800"/>
+            <a:ext cx="2617401" cy="4351337"/>
+          </a:xfrm>
+        </p:spPr>
+        <p:txBody>
+          <a:bodyPr/>
+          <a:lstStyle/>
+          <a:p>
+            <a:r>
+              <a:rPr lang="sr-Latn-RS" dirty="0"/>
+              <a:t>3. BFS – radimo bfs u grafu da bi smo našli put od trogula u kome je tačka A do trougla u kome je tačka B</a:t>
+            </a:r>
+          </a:p>
+        </p:txBody>
+      </p:sp>
+      <p:pic>
+        <p:nvPicPr>
+          <p:cNvPr id="5" name="Picture 4">
+            <a:extLst>
+              <a:ext uri="{FF2B5EF4-FFF2-40B4-BE49-F238E27FC236}">
+                <a16:creationId xmlns:a16="http://schemas.microsoft.com/office/drawing/2014/main" id="{E0DD25D9-E6CF-551E-3C2A-BE2FEE4EB259}"/>
+              </a:ext>
+            </a:extLst>
+          </p:cNvPr>
+          <p:cNvPicPr>
+            <a:picLocks noChangeAspect="1"/>
+          </p:cNvPicPr>
+          <p:nvPr/>
+        </p:nvPicPr>
+        <p:blipFill>
+          <a:blip r:embed="rId2">
+            <a:extLst>
+              <a:ext uri="{28A0092B-C50C-407E-A947-70E740481C1C}">
+                <a14:useLocalDpi xmlns:a14="http://schemas.microsoft.com/office/drawing/2010/main" val="0"/>
+              </a:ext>
+            </a:extLst>
+          </a:blip>
+          <a:stretch>
+            <a:fillRect/>
+          </a:stretch>
+        </p:blipFill>
+        <p:spPr>
+          <a:xfrm>
+            <a:off x="4668983" y="785090"/>
+            <a:ext cx="6126788" cy="5514109"/>
+          </a:xfrm>
+          <a:prstGeom prst="rect">
+            <a:avLst/>
+          </a:prstGeom>
+        </p:spPr>
+      </p:pic>
+    </p:spTree>
+    <p:extLst>
+      <p:ext uri="{BB962C8B-B14F-4D97-AF65-F5344CB8AC3E}">
+        <p14:creationId xmlns:p14="http://schemas.microsoft.com/office/powerpoint/2010/main" val="573379033"/>
+      </p:ext>
+    </p:extLst>
+  </p:cSld>
+  <p:clrMapOvr>
+    <a:masterClrMapping/>
+  </p:clrMapOvr>
+</p:sld>
+</file>
+
+<file path=ppt/slides/slide6.xml><?xml version="1.0" encoding="utf-8"?>
+<p:sld xmlns:a="http://schemas.openxmlformats.org/drawingml/2006/main" xmlns:r="http://schemas.openxmlformats.org/officeDocument/2006/relationships" xmlns:p="http://schemas.openxmlformats.org/presentationml/2006/main">
+  <p:cSld>
+    <p:spTree>
+      <p:nvGrpSpPr>
+        <p:cNvPr id="1" name="">
+          <a:extLst>
+            <a:ext uri="{FF2B5EF4-FFF2-40B4-BE49-F238E27FC236}">
+              <a16:creationId xmlns:a16="http://schemas.microsoft.com/office/drawing/2014/main" id="{E4B51E8A-F9A6-459E-7975-AA248B32F086}"/>
+            </a:ext>
+          </a:extLst>
+        </p:cNvPr>
+        <p:cNvGrpSpPr/>
+        <p:nvPr/>
+      </p:nvGrpSpPr>
+      <p:grpSpPr>
+        <a:xfrm>
+          <a:off x="0" y="0"/>
+          <a:ext cx="0" cy="0"/>
+          <a:chOff x="0" y="0"/>
+          <a:chExt cx="0" cy="0"/>
+        </a:xfrm>
+      </p:grpSpPr>
+      <p:sp>
+        <p:nvSpPr>
+          <p:cNvPr id="2" name="Title 1">
+            <a:extLst>
+              <a:ext uri="{FF2B5EF4-FFF2-40B4-BE49-F238E27FC236}">
+                <a16:creationId xmlns:a16="http://schemas.microsoft.com/office/drawing/2014/main" id="{8EF7DBA0-8BE7-9C7E-547C-FEAD5DECDF75}"/>
+              </a:ext>
+            </a:extLst>
+          </p:cNvPr>
+          <p:cNvSpPr>
+            <a:spLocks noGrp="1"/>
+          </p:cNvSpPr>
+          <p:nvPr>
+            <p:ph type="title"/>
+          </p:nvPr>
+        </p:nvSpPr>
+        <p:spPr/>
+        <p:txBody>
+          <a:bodyPr/>
+          <a:lstStyle/>
+          <a:p>
+            <a:r>
+              <a:rPr lang="en-US" dirty="0"/>
+              <a:t>Re</a:t>
+            </a:r>
+            <a:r>
+              <a:rPr lang="sr-Latn-RS" dirty="0"/>
+              <a:t>šenje</a:t>
+            </a:r>
+            <a:endParaRPr lang="en-US" dirty="0"/>
+          </a:p>
+        </p:txBody>
+      </p:sp>
+      <p:sp>
+        <p:nvSpPr>
+          <p:cNvPr id="3" name="Content Placeholder 2">
+            <a:extLst>
+              <a:ext uri="{FF2B5EF4-FFF2-40B4-BE49-F238E27FC236}">
+                <a16:creationId xmlns:a16="http://schemas.microsoft.com/office/drawing/2014/main" id="{49267905-87A9-E9DC-8AFE-AC7F6F9AC6FF}"/>
+              </a:ext>
+            </a:extLst>
+          </p:cNvPr>
+          <p:cNvSpPr>
+            <a:spLocks noGrp="1"/>
+          </p:cNvSpPr>
+          <p:nvPr>
+            <p:ph idx="1"/>
+          </p:nvPr>
+        </p:nvSpPr>
+        <p:spPr>
+          <a:xfrm>
+            <a:off x="1261872" y="1828800"/>
+            <a:ext cx="3485619" cy="4351337"/>
+          </a:xfrm>
+        </p:spPr>
+        <p:txBody>
+          <a:bodyPr/>
+          <a:lstStyle/>
+          <a:p>
+            <a:r>
+              <a:rPr lang="sr-Latn-RS" dirty="0"/>
+              <a:t>4. Nakon bfs dobijamo niz trouglova u kome je garantovano da se nalazi naš najkraći put. Sada se problem svodi na to da nađemo tačno koji je to put i to će nam rešiti funnel algoritam.</a:t>
+            </a:r>
+          </a:p>
+        </p:txBody>
+      </p:sp>
+      <p:pic>
+        <p:nvPicPr>
+          <p:cNvPr id="5" name="Picture 4">
+            <a:extLst>
+              <a:ext uri="{FF2B5EF4-FFF2-40B4-BE49-F238E27FC236}">
+                <a16:creationId xmlns:a16="http://schemas.microsoft.com/office/drawing/2014/main" id="{03F6DF5D-651A-D4E3-B1C6-F7D579B7258E}"/>
+              </a:ext>
+            </a:extLst>
+          </p:cNvPr>
+          <p:cNvPicPr>
+            <a:picLocks noChangeAspect="1"/>
+          </p:cNvPicPr>
+          <p:nvPr/>
+        </p:nvPicPr>
+        <p:blipFill>
+          <a:blip r:embed="rId2">
+            <a:extLst>
+              <a:ext uri="{28A0092B-C50C-407E-A947-70E740481C1C}">
+                <a14:useLocalDpi xmlns:a14="http://schemas.microsoft.com/office/drawing/2010/main" val="0"/>
+              </a:ext>
+            </a:extLst>
+          </a:blip>
+          <a:stretch>
+            <a:fillRect/>
+          </a:stretch>
+        </p:blipFill>
+        <p:spPr>
+          <a:xfrm>
+            <a:off x="5249494" y="841345"/>
+            <a:ext cx="5740753" cy="5166678"/>
+          </a:xfrm>
+          <a:prstGeom prst="rect">
+            <a:avLst/>
+          </a:prstGeom>
+        </p:spPr>
+      </p:pic>
+    </p:spTree>
+    <p:extLst>
+      <p:ext uri="{BB962C8B-B14F-4D97-AF65-F5344CB8AC3E}">
+        <p14:creationId xmlns:p14="http://schemas.microsoft.com/office/powerpoint/2010/main" val="3788633677"/>
+      </p:ext>
+    </p:extLst>
+  </p:cSld>
+  <p:clrMapOvr>
+    <a:masterClrMapping/>
+  </p:clrMapOvr>
+</p:sld>
+</file>
+
+<file path=ppt/slides/slide7.xml><?xml version="1.0" encoding="utf-8"?>
+<p:sld xmlns:a="http://schemas.openxmlformats.org/drawingml/2006/main" xmlns:r="http://schemas.openxmlformats.org/officeDocument/2006/relationships" xmlns:p="http://schemas.openxmlformats.org/presentationml/2006/main">
+  <p:cSld>
+    <p:spTree>
+      <p:nvGrpSpPr>
+        <p:cNvPr id="1" name="">
+          <a:extLst>
+            <a:ext uri="{FF2B5EF4-FFF2-40B4-BE49-F238E27FC236}">
+              <a16:creationId xmlns:a16="http://schemas.microsoft.com/office/drawing/2014/main" id="{87A90137-4CBD-14FB-3D27-BB6D63B204B2}"/>
+            </a:ext>
+          </a:extLst>
+        </p:cNvPr>
+        <p:cNvGrpSpPr/>
+        <p:nvPr/>
+      </p:nvGrpSpPr>
+      <p:grpSpPr>
+        <a:xfrm>
+          <a:off x="0" y="0"/>
+          <a:ext cx="0" cy="0"/>
+          <a:chOff x="0" y="0"/>
+          <a:chExt cx="0" cy="0"/>
+        </a:xfrm>
+      </p:grpSpPr>
+      <p:sp>
+        <p:nvSpPr>
+          <p:cNvPr id="2" name="Title 1">
+            <a:extLst>
+              <a:ext uri="{FF2B5EF4-FFF2-40B4-BE49-F238E27FC236}">
+                <a16:creationId xmlns:a16="http://schemas.microsoft.com/office/drawing/2014/main" id="{40BAA20D-CB7A-15A6-3122-36912A307428}"/>
+              </a:ext>
+            </a:extLst>
+          </p:cNvPr>
+          <p:cNvSpPr>
+            <a:spLocks noGrp="1"/>
+          </p:cNvSpPr>
+          <p:nvPr>
+            <p:ph type="title"/>
+          </p:nvPr>
+        </p:nvSpPr>
+        <p:spPr/>
+        <p:txBody>
+          <a:bodyPr/>
+          <a:lstStyle/>
+          <a:p>
+            <a:r>
+              <a:rPr lang="en-US" dirty="0"/>
+              <a:t>Re</a:t>
+            </a:r>
+            <a:r>
+              <a:rPr lang="sr-Latn-RS" dirty="0"/>
+              <a:t>šenje</a:t>
+            </a:r>
+            <a:endParaRPr lang="en-US" dirty="0"/>
+          </a:p>
+        </p:txBody>
+      </p:sp>
+      <p:sp>
+        <p:nvSpPr>
+          <p:cNvPr id="3" name="Content Placeholder 2">
+            <a:extLst>
+              <a:ext uri="{FF2B5EF4-FFF2-40B4-BE49-F238E27FC236}">
+                <a16:creationId xmlns:a16="http://schemas.microsoft.com/office/drawing/2014/main" id="{3AAB5269-E198-06CA-4EE6-C76EA88008DC}"/>
+              </a:ext>
+            </a:extLst>
+          </p:cNvPr>
+          <p:cNvSpPr>
+            <a:spLocks noGrp="1"/>
+          </p:cNvSpPr>
+          <p:nvPr>
+            <p:ph idx="1"/>
+          </p:nvPr>
+        </p:nvSpPr>
+        <p:spPr>
+          <a:xfrm>
+            <a:off x="1261872" y="1828800"/>
+            <a:ext cx="3827364" cy="4351337"/>
+          </a:xfrm>
+        </p:spPr>
+        <p:txBody>
+          <a:bodyPr/>
+          <a:lstStyle/>
+          <a:p>
+            <a:r>
+              <a:rPr lang="sr-Latn-RS" dirty="0"/>
+              <a:t>5. Identifikujemo </a:t>
+            </a:r>
+            <a:r>
+              <a:rPr lang="en-US" dirty="0"/>
+              <a:t>“</a:t>
+            </a:r>
+            <a:r>
+              <a:rPr lang="en-US" dirty="0" err="1"/>
+              <a:t>portale</a:t>
+            </a:r>
+            <a:r>
+              <a:rPr lang="en-US" dirty="0"/>
+              <a:t>”</a:t>
+            </a:r>
+            <a:r>
+              <a:rPr lang="sr-Latn-RS" dirty="0"/>
+              <a:t> - p</a:t>
+            </a:r>
+            <a:r>
+              <a:rPr lang="en-US" dirty="0" err="1"/>
+              <a:t>ortali</a:t>
+            </a:r>
+            <a:r>
+              <a:rPr lang="en-US" dirty="0"/>
+              <a:t> </a:t>
+            </a:r>
+            <a:r>
+              <a:rPr lang="en-US" dirty="0" err="1"/>
+              <a:t>su</a:t>
+            </a:r>
+            <a:r>
+              <a:rPr lang="sr-Latn-RS" dirty="0"/>
+              <a:t> (u ovom redosledu)</a:t>
+            </a:r>
+            <a:r>
+              <a:rPr lang="en-US" dirty="0"/>
+              <a:t> – </a:t>
+            </a:r>
+            <a:r>
+              <a:rPr lang="sr-Latn-RS" dirty="0"/>
+              <a:t>tačka A, stranica koju dele prvi i drugi trougao, stranica koju dele drugi i treći trougao ... sve do stranice koju dele predposlednji i poslednji trougao, kao i tačka B.</a:t>
+            </a:r>
+          </a:p>
+        </p:txBody>
+      </p:sp>
+      <p:pic>
+        <p:nvPicPr>
+          <p:cNvPr id="5" name="Picture 4">
+            <a:extLst>
+              <a:ext uri="{FF2B5EF4-FFF2-40B4-BE49-F238E27FC236}">
+                <a16:creationId xmlns:a16="http://schemas.microsoft.com/office/drawing/2014/main" id="{46AAE679-CA09-92CF-5FCD-075F7B8BE609}"/>
+              </a:ext>
+            </a:extLst>
+          </p:cNvPr>
+          <p:cNvPicPr>
+            <a:picLocks noChangeAspect="1"/>
+          </p:cNvPicPr>
+          <p:nvPr/>
+        </p:nvPicPr>
+        <p:blipFill>
+          <a:blip r:embed="rId2">
+            <a:extLst>
+              <a:ext uri="{28A0092B-C50C-407E-A947-70E740481C1C}">
+                <a14:useLocalDpi xmlns:a14="http://schemas.microsoft.com/office/drawing/2010/main" val="0"/>
+              </a:ext>
+            </a:extLst>
+          </a:blip>
+          <a:stretch>
+            <a:fillRect/>
+          </a:stretch>
+        </p:blipFill>
+        <p:spPr>
+          <a:xfrm>
+            <a:off x="5786582" y="1207654"/>
+            <a:ext cx="4936323" cy="4442691"/>
+          </a:xfrm>
+          <a:prstGeom prst="rect">
+            <a:avLst/>
+          </a:prstGeom>
+        </p:spPr>
+      </p:pic>
+      <p:sp>
+        <p:nvSpPr>
+          <p:cNvPr id="6" name="TextBox 5">
+            <a:extLst>
+              <a:ext uri="{FF2B5EF4-FFF2-40B4-BE49-F238E27FC236}">
+                <a16:creationId xmlns:a16="http://schemas.microsoft.com/office/drawing/2014/main" id="{5525F61B-4B26-19C9-0BE3-5222B44C3FC3}"/>
+              </a:ext>
+            </a:extLst>
+          </p:cNvPr>
+          <p:cNvSpPr txBox="1"/>
+          <p:nvPr/>
+        </p:nvSpPr>
+        <p:spPr>
+          <a:xfrm>
+            <a:off x="6982691" y="5810805"/>
+            <a:ext cx="2339102" cy="369332"/>
+          </a:xfrm>
+          <a:prstGeom prst="rect">
+            <a:avLst/>
+          </a:prstGeom>
+          <a:noFill/>
+        </p:spPr>
+        <p:txBody>
+          <a:bodyPr wrap="none" rtlCol="0">
+            <a:spAutoFit/>
+          </a:bodyPr>
+          <a:lstStyle/>
+          <a:p>
+            <a:r>
+              <a:rPr lang="sr-Latn-RS" dirty="0"/>
+              <a:t>Redosled portala</a:t>
+            </a:r>
+            <a:endParaRPr lang="en-US" dirty="0"/>
+          </a:p>
+        </p:txBody>
+      </p:sp>
+    </p:spTree>
+    <p:extLst>
+      <p:ext uri="{BB962C8B-B14F-4D97-AF65-F5344CB8AC3E}">
+        <p14:creationId xmlns:p14="http://schemas.microsoft.com/office/powerpoint/2010/main" val="526980605"/>
+      </p:ext>
+    </p:extLst>
+  </p:cSld>
+  <p:clrMapOvr>
+    <a:masterClrMapping/>
+  </p:clrMapOvr>
+</p:sld>
+</file>
+
+<file path=ppt/slides/slide8.xml><?xml version="1.0" encoding="utf-8"?>
+<p:sld xmlns:a="http://schemas.openxmlformats.org/drawingml/2006/main" xmlns:r="http://schemas.openxmlformats.org/officeDocument/2006/relationships" xmlns:p="http://schemas.openxmlformats.org/presentationml/2006/main">
+  <p:cSld>
+    <p:spTree>
+      <p:nvGrpSpPr>
+        <p:cNvPr id="1" name="">
+          <a:extLst>
+            <a:ext uri="{FF2B5EF4-FFF2-40B4-BE49-F238E27FC236}">
+              <a16:creationId xmlns:a16="http://schemas.microsoft.com/office/drawing/2014/main" id="{178E8674-3EFD-B34C-1ECE-60944AE7A4DE}"/>
+            </a:ext>
+          </a:extLst>
+        </p:cNvPr>
+        <p:cNvGrpSpPr/>
+        <p:nvPr/>
+      </p:nvGrpSpPr>
+      <p:grpSpPr>
+        <a:xfrm>
+          <a:off x="0" y="0"/>
+          <a:ext cx="0" cy="0"/>
+          <a:chOff x="0" y="0"/>
+          <a:chExt cx="0" cy="0"/>
+        </a:xfrm>
+      </p:grpSpPr>
+      <p:sp>
+        <p:nvSpPr>
+          <p:cNvPr id="2" name="Title 1">
+            <a:extLst>
+              <a:ext uri="{FF2B5EF4-FFF2-40B4-BE49-F238E27FC236}">
+                <a16:creationId xmlns:a16="http://schemas.microsoft.com/office/drawing/2014/main" id="{BB57C9C7-4605-ABE3-5AB0-DF6B78FD07B9}"/>
+              </a:ext>
+            </a:extLst>
+          </p:cNvPr>
+          <p:cNvSpPr>
+            <a:spLocks noGrp="1"/>
+          </p:cNvSpPr>
+          <p:nvPr>
+            <p:ph type="title"/>
+          </p:nvPr>
+        </p:nvSpPr>
+        <p:spPr/>
+        <p:txBody>
+          <a:bodyPr/>
+          <a:lstStyle/>
+          <a:p>
+            <a:r>
+              <a:rPr lang="en-US" dirty="0"/>
+              <a:t>Re</a:t>
+            </a:r>
+            <a:r>
+              <a:rPr lang="sr-Latn-RS" dirty="0"/>
+              <a:t>šenje</a:t>
+            </a:r>
+            <a:endParaRPr lang="en-US" dirty="0"/>
+          </a:p>
+        </p:txBody>
+      </p:sp>
+      <p:sp>
+        <p:nvSpPr>
+          <p:cNvPr id="3" name="Content Placeholder 2">
+            <a:extLst>
+              <a:ext uri="{FF2B5EF4-FFF2-40B4-BE49-F238E27FC236}">
+                <a16:creationId xmlns:a16="http://schemas.microsoft.com/office/drawing/2014/main" id="{6BA99431-F57F-0159-BF5F-4CBD558CF107}"/>
+              </a:ext>
+            </a:extLst>
+          </p:cNvPr>
+          <p:cNvSpPr>
+            <a:spLocks noGrp="1"/>
+          </p:cNvSpPr>
+          <p:nvPr>
+            <p:ph idx="1"/>
+          </p:nvPr>
+        </p:nvSpPr>
+        <p:spPr>
+          <a:xfrm>
+            <a:off x="1261872" y="1828800"/>
+            <a:ext cx="3642637" cy="4351337"/>
+          </a:xfrm>
+        </p:spPr>
+        <p:txBody>
+          <a:bodyPr/>
+          <a:lstStyle/>
+          <a:p>
+            <a:r>
+              <a:rPr lang="sr-Latn-RS" dirty="0"/>
+              <a:t>6. Funnel algoritam – Od niza portala možemo dobiti najkraći put između A i B. Ovaj algoritam će biti detaljnije opisan u narednim slajdovima</a:t>
+            </a:r>
+          </a:p>
+        </p:txBody>
+      </p:sp>
+      <p:pic>
+        <p:nvPicPr>
+          <p:cNvPr id="5" name="Picture 4">
+            <a:extLst>
+              <a:ext uri="{FF2B5EF4-FFF2-40B4-BE49-F238E27FC236}">
+                <a16:creationId xmlns:a16="http://schemas.microsoft.com/office/drawing/2014/main" id="{5EE796CC-19DA-C174-765E-2ED0994DA885}"/>
+              </a:ext>
+            </a:extLst>
+          </p:cNvPr>
+          <p:cNvPicPr>
+            <a:picLocks noChangeAspect="1"/>
+          </p:cNvPicPr>
+          <p:nvPr/>
+        </p:nvPicPr>
+        <p:blipFill>
+          <a:blip r:embed="rId2">
+            <a:extLst>
+              <a:ext uri="{28A0092B-C50C-407E-A947-70E740481C1C}">
+                <a14:useLocalDpi xmlns:a14="http://schemas.microsoft.com/office/drawing/2010/main" val="0"/>
+              </a:ext>
+            </a:extLst>
+          </a:blip>
+          <a:stretch>
+            <a:fillRect/>
+          </a:stretch>
+        </p:blipFill>
+        <p:spPr>
+          <a:xfrm>
+            <a:off x="5241636" y="1028541"/>
+            <a:ext cx="5870222" cy="5283200"/>
+          </a:xfrm>
+          <a:prstGeom prst="rect">
+            <a:avLst/>
+          </a:prstGeom>
+        </p:spPr>
+      </p:pic>
+    </p:spTree>
+    <p:extLst>
+      <p:ext uri="{BB962C8B-B14F-4D97-AF65-F5344CB8AC3E}">
+        <p14:creationId xmlns:p14="http://schemas.microsoft.com/office/powerpoint/2010/main" val="1518282004"/>
+      </p:ext>
+    </p:extLst>
+  </p:cSld>
+  <p:clrMapOvr>
+    <a:masterClrMapping/>
+  </p:clrMapOvr>
+</p:sld>
+</file>
+
+<file path=ppt/slides/slide9.xml><?xml version="1.0" encoding="utf-8"?>
+<p:sld xmlns:a="http://schemas.openxmlformats.org/drawingml/2006/main" xmlns:r="http://schemas.openxmlformats.org/officeDocument/2006/relationships" xmlns:p="http://schemas.openxmlformats.org/presentationml/2006/main">
+  <p:cSld>
+    <p:spTree>
+      <p:nvGrpSpPr>
+        <p:cNvPr id="1" name=""/>
+        <p:cNvGrpSpPr/>
+        <p:nvPr/>
+      </p:nvGrpSpPr>
+      <p:grpSpPr>
+        <a:xfrm>
+          <a:off x="0" y="0"/>
+          <a:ext cx="0" cy="0"/>
+          <a:chOff x="0" y="0"/>
+          <a:chExt cx="0" cy="0"/>
+        </a:xfrm>
+      </p:grpSpPr>
+      <p:sp>
+        <p:nvSpPr>
+          <p:cNvPr id="2" name="Title 1">
+            <a:extLst>
+              <a:ext uri="{FF2B5EF4-FFF2-40B4-BE49-F238E27FC236}">
+                <a16:creationId xmlns:a16="http://schemas.microsoft.com/office/drawing/2014/main" id="{60D91BA4-2A70-6AD4-93A7-9F6025273139}"/>
+              </a:ext>
+            </a:extLst>
+          </p:cNvPr>
+          <p:cNvSpPr>
+            <a:spLocks noGrp="1"/>
+          </p:cNvSpPr>
+          <p:nvPr>
+            <p:ph type="title"/>
+          </p:nvPr>
+        </p:nvSpPr>
+        <p:spPr>
+          <a:xfrm>
+            <a:off x="1261872" y="365760"/>
+            <a:ext cx="7124746" cy="1325562"/>
+          </a:xfrm>
+        </p:spPr>
+        <p:txBody>
+          <a:bodyPr/>
+          <a:lstStyle/>
+          <a:p>
+            <a:r>
+              <a:rPr lang="sr-Latn-RS" dirty="0"/>
+              <a:t>Funnel algoritam - detalji</a:t>
+            </a:r>
+            <a:endParaRPr lang="en-US" dirty="0"/>
+          </a:p>
+        </p:txBody>
+      </p:sp>
+      <p:sp>
+        <p:nvSpPr>
+          <p:cNvPr id="3" name="Content Placeholder 2">
+            <a:extLst>
+              <a:ext uri="{FF2B5EF4-FFF2-40B4-BE49-F238E27FC236}">
+                <a16:creationId xmlns:a16="http://schemas.microsoft.com/office/drawing/2014/main" id="{5A5446B6-6E01-42EF-3395-C8CC4FA45A5B}"/>
+              </a:ext>
+            </a:extLst>
+          </p:cNvPr>
+          <p:cNvSpPr>
+            <a:spLocks noGrp="1"/>
+          </p:cNvSpPr>
+          <p:nvPr>
+            <p:ph idx="1"/>
+          </p:nvPr>
+        </p:nvSpPr>
+        <p:spPr>
+          <a:xfrm>
+            <a:off x="1261872" y="1828800"/>
+            <a:ext cx="4085983" cy="4351337"/>
+          </a:xfrm>
+        </p:spPr>
+        <p:txBody>
+          <a:bodyPr>
+            <a:normAutofit fontScale="92500" lnSpcReduction="10000"/>
+          </a:bodyPr>
+          <a:lstStyle/>
+          <a:p>
+            <a:pPr marL="0" indent="0">
+              <a:buNone/>
+            </a:pPr>
+            <a:r>
+              <a:rPr lang="sr-Latn-RS" dirty="0"/>
+              <a:t>Algoritam postepeno kreira</a:t>
+            </a:r>
+            <a:r>
+              <a:rPr lang="en-US" dirty="0"/>
+              <a:t> </a:t>
+            </a:r>
+            <a:r>
+              <a:rPr lang="en-US" dirty="0" err="1"/>
+              <a:t>optimalan</a:t>
+            </a:r>
+            <a:r>
+              <a:rPr lang="en-US" dirty="0"/>
+              <a:t> put. U </a:t>
+            </a:r>
+            <a:r>
+              <a:rPr lang="en-US" dirty="0" err="1"/>
+              <a:t>svakom</a:t>
+            </a:r>
+            <a:r>
+              <a:rPr lang="en-US" dirty="0"/>
+              <a:t> </a:t>
+            </a:r>
+            <a:r>
+              <a:rPr lang="en-US" dirty="0" err="1"/>
+              <a:t>koraku</a:t>
+            </a:r>
+            <a:r>
+              <a:rPr lang="en-US" dirty="0"/>
+              <a:t> </a:t>
+            </a:r>
+            <a:r>
+              <a:rPr lang="sr-Latn-RS" dirty="0"/>
+              <a:t>imamo:</a:t>
+            </a:r>
+          </a:p>
+          <a:p>
+            <a:r>
+              <a:rPr lang="sr-Latn-RS" dirty="0"/>
+              <a:t>apex – poslednja tačka u dosad pronađenom putu</a:t>
+            </a:r>
+          </a:p>
+          <a:p>
+            <a:r>
+              <a:rPr lang="sr-Latn-RS" dirty="0"/>
+              <a:t>levi a i desna strana funnel-a</a:t>
+            </a:r>
+          </a:p>
+          <a:p>
+            <a:r>
+              <a:rPr lang="sr-Latn-RS" dirty="0"/>
+              <a:t>trenutni portal</a:t>
+            </a:r>
+          </a:p>
+          <a:p>
+            <a:endParaRPr lang="sr-Latn-RS" dirty="0"/>
+          </a:p>
+          <a:p>
+            <a:pPr marL="0" indent="0">
+              <a:buNone/>
+            </a:pPr>
+            <a:r>
+              <a:rPr lang="sr-Latn-RS" dirty="0"/>
+              <a:t>Na početku, prvi apex je A. Zatim postepeno nalazimo apex-e dok nismo našli ceo put. Poslednji apex će biti tačka B.</a:t>
+            </a:r>
+            <a:endParaRPr lang="en-US" dirty="0"/>
+          </a:p>
+        </p:txBody>
+      </p:sp>
+      <p:pic>
+        <p:nvPicPr>
+          <p:cNvPr id="5" name="Picture 4">
+            <a:extLst>
+              <a:ext uri="{FF2B5EF4-FFF2-40B4-BE49-F238E27FC236}">
+                <a16:creationId xmlns:a16="http://schemas.microsoft.com/office/drawing/2014/main" id="{4418F954-B6DD-BAAD-CF97-709857CAEE9C}"/>
+              </a:ext>
+            </a:extLst>
+          </p:cNvPr>
+          <p:cNvPicPr>
+            <a:picLocks noChangeAspect="1"/>
+          </p:cNvPicPr>
+          <p:nvPr/>
+        </p:nvPicPr>
+        <p:blipFill>
+          <a:blip r:embed="rId2">
+            <a:extLst>
+              <a:ext uri="{28A0092B-C50C-407E-A947-70E740481C1C}">
+                <a14:useLocalDpi xmlns:a14="http://schemas.microsoft.com/office/drawing/2010/main" val="0"/>
+              </a:ext>
+            </a:extLst>
+          </a:blip>
+          <a:stretch>
+            <a:fillRect/>
+          </a:stretch>
+        </p:blipFill>
+        <p:spPr>
+          <a:xfrm>
+            <a:off x="5590052" y="1691322"/>
+            <a:ext cx="5593131" cy="5033818"/>
+          </a:xfrm>
+          <a:prstGeom prst="rect">
+            <a:avLst/>
+          </a:prstGeom>
+        </p:spPr>
+      </p:pic>
+    </p:spTree>
+    <p:extLst>
+      <p:ext uri="{BB962C8B-B14F-4D97-AF65-F5344CB8AC3E}">
+        <p14:creationId xmlns:p14="http://schemas.microsoft.com/office/powerpoint/2010/main" val="374358044"/>
       </p:ext>
     </p:extLst>
   </p:cSld>

--- a/Funnel Algorithm.pptx
+++ b/Funnel Algorithm.pptx
@@ -18,6 +18,7 @@
     <p:sldId id="266" r:id="rId12"/>
     <p:sldId id="267" r:id="rId13"/>
     <p:sldId id="268" r:id="rId14"/>
+    <p:sldId id="269" r:id="rId15"/>
   </p:sldIdLst>
   <p:sldSz cx="12192000" cy="6858000"/>
   <p:notesSz cx="6858000" cy="9144000"/>
@@ -292,7 +293,7 @@
           <a:p>
             <a:fld id="{D84209EC-1488-4E82-9F72-DBA324CD659A}" type="datetimeFigureOut">
               <a:rPr lang="en-US" smtClean="0"/>
-              <a:t>1/22/2026</a:t>
+              <a:t>2/2/2026</a:t>
             </a:fld>
             <a:endParaRPr lang="en-US"/>
           </a:p>
@@ -520,7 +521,7 @@
           <a:p>
             <a:fld id="{D84209EC-1488-4E82-9F72-DBA324CD659A}" type="datetimeFigureOut">
               <a:rPr lang="en-US" smtClean="0"/>
-              <a:t>1/22/2026</a:t>
+              <a:t>2/2/2026</a:t>
             </a:fld>
             <a:endParaRPr lang="en-US"/>
           </a:p>
@@ -700,7 +701,7 @@
           <a:p>
             <a:fld id="{D84209EC-1488-4E82-9F72-DBA324CD659A}" type="datetimeFigureOut">
               <a:rPr lang="en-US" smtClean="0"/>
-              <a:t>1/22/2026</a:t>
+              <a:t>2/2/2026</a:t>
             </a:fld>
             <a:endParaRPr lang="en-US"/>
           </a:p>
@@ -870,7 +871,7 @@
           <a:p>
             <a:fld id="{D84209EC-1488-4E82-9F72-DBA324CD659A}" type="datetimeFigureOut">
               <a:rPr lang="en-US" smtClean="0"/>
-              <a:t>1/22/2026</a:t>
+              <a:t>2/2/2026</a:t>
             </a:fld>
             <a:endParaRPr lang="en-US"/>
           </a:p>
@@ -1124,7 +1125,7 @@
           <a:p>
             <a:fld id="{D84209EC-1488-4E82-9F72-DBA324CD659A}" type="datetimeFigureOut">
               <a:rPr lang="en-US" smtClean="0"/>
-              <a:t>1/22/2026</a:t>
+              <a:t>2/2/2026</a:t>
             </a:fld>
             <a:endParaRPr lang="en-US"/>
           </a:p>
@@ -1450,7 +1451,7 @@
           <a:p>
             <a:fld id="{D84209EC-1488-4E82-9F72-DBA324CD659A}" type="datetimeFigureOut">
               <a:rPr lang="en-US" smtClean="0"/>
-              <a:t>1/22/2026</a:t>
+              <a:t>2/2/2026</a:t>
             </a:fld>
             <a:endParaRPr lang="en-US"/>
           </a:p>
@@ -1901,7 +1902,7 @@
           <a:p>
             <a:fld id="{D84209EC-1488-4E82-9F72-DBA324CD659A}" type="datetimeFigureOut">
               <a:rPr lang="en-US" smtClean="0"/>
-              <a:t>1/22/2026</a:t>
+              <a:t>2/2/2026</a:t>
             </a:fld>
             <a:endParaRPr lang="en-US"/>
           </a:p>
@@ -2019,7 +2020,7 @@
           <a:p>
             <a:fld id="{D84209EC-1488-4E82-9F72-DBA324CD659A}" type="datetimeFigureOut">
               <a:rPr lang="en-US" smtClean="0"/>
-              <a:t>1/22/2026</a:t>
+              <a:t>2/2/2026</a:t>
             </a:fld>
             <a:endParaRPr lang="en-US"/>
           </a:p>
@@ -2114,7 +2115,7 @@
           <a:p>
             <a:fld id="{D84209EC-1488-4E82-9F72-DBA324CD659A}" type="datetimeFigureOut">
               <a:rPr lang="en-US" smtClean="0"/>
-              <a:t>1/22/2026</a:t>
+              <a:t>2/2/2026</a:t>
             </a:fld>
             <a:endParaRPr lang="en-US"/>
           </a:p>
@@ -2401,7 +2402,7 @@
           <a:p>
             <a:fld id="{D84209EC-1488-4E82-9F72-DBA324CD659A}" type="datetimeFigureOut">
               <a:rPr lang="en-US" smtClean="0"/>
-              <a:t>1/22/2026</a:t>
+              <a:t>2/2/2026</a:t>
             </a:fld>
             <a:endParaRPr lang="en-US"/>
           </a:p>
@@ -2723,7 +2724,7 @@
           <a:p>
             <a:fld id="{D84209EC-1488-4E82-9F72-DBA324CD659A}" type="datetimeFigureOut">
               <a:rPr lang="en-US" smtClean="0"/>
-              <a:t>1/22/2026</a:t>
+              <a:t>2/2/2026</a:t>
             </a:fld>
             <a:endParaRPr lang="en-US"/>
           </a:p>
@@ -2977,7 +2978,7 @@
           <a:p>
             <a:fld id="{D84209EC-1488-4E82-9F72-DBA324CD659A}" type="datetimeFigureOut">
               <a:rPr lang="en-US" smtClean="0"/>
-              <a:t>1/22/2026</a:t>
+              <a:t>2/2/2026</a:t>
             </a:fld>
             <a:endParaRPr lang="en-US"/>
           </a:p>
@@ -4099,9 +4100,14 @@
         </p:nvSpPr>
         <p:spPr/>
         <p:txBody>
-          <a:bodyPr/>
-          <a:lstStyle/>
-          <a:p>
+          <a:bodyPr>
+            <a:normAutofit/>
+          </a:bodyPr>
+          <a:lstStyle/>
+          <a:p>
+            <a:pPr marL="0" indent="0">
+              <a:buNone/>
+            </a:pPr>
             <a:r>
               <a:rPr lang="en-US" dirty="0" err="1"/>
               <a:t>Aplikacija</a:t>
@@ -4147,6 +4153,10 @@
               <a:rPr lang="sr-Latn-RS" dirty="0"/>
               <a:t>F – mali korak: odradi se trenutni korak ili sledeća iteracija trenutnog algoritma. Može se držati</a:t>
             </a:r>
+            <a:endParaRPr lang="en-US" dirty="0"/>
+          </a:p>
+          <a:p>
+            <a:endParaRPr lang="sr-Latn-RS" dirty="0"/>
           </a:p>
         </p:txBody>
       </p:sp>
@@ -4154,6 +4164,226 @@
     <p:extLst>
       <p:ext uri="{BB962C8B-B14F-4D97-AF65-F5344CB8AC3E}">
         <p14:creationId xmlns:p14="http://schemas.microsoft.com/office/powerpoint/2010/main" val="102535477"/>
+      </p:ext>
+    </p:extLst>
+  </p:cSld>
+  <p:clrMapOvr>
+    <a:masterClrMapping/>
+  </p:clrMapOvr>
+</p:sld>
+</file>
+
+<file path=ppt/slides/slide14.xml><?xml version="1.0" encoding="utf-8"?>
+<p:sld xmlns:a="http://schemas.openxmlformats.org/drawingml/2006/main" xmlns:r="http://schemas.openxmlformats.org/officeDocument/2006/relationships" xmlns:p="http://schemas.openxmlformats.org/presentationml/2006/main">
+  <p:cSld>
+    <p:spTree>
+      <p:nvGrpSpPr>
+        <p:cNvPr id="1" name="">
+          <a:extLst>
+            <a:ext uri="{FF2B5EF4-FFF2-40B4-BE49-F238E27FC236}">
+              <a16:creationId xmlns:a16="http://schemas.microsoft.com/office/drawing/2014/main" id="{E6562C3F-E8F4-2E7A-B1EE-C64A9AF0B2A4}"/>
+            </a:ext>
+          </a:extLst>
+        </p:cNvPr>
+        <p:cNvGrpSpPr/>
+        <p:nvPr/>
+      </p:nvGrpSpPr>
+      <p:grpSpPr>
+        <a:xfrm>
+          <a:off x="0" y="0"/>
+          <a:ext cx="0" cy="0"/>
+          <a:chOff x="0" y="0"/>
+          <a:chExt cx="0" cy="0"/>
+        </a:xfrm>
+      </p:grpSpPr>
+      <p:sp>
+        <p:nvSpPr>
+          <p:cNvPr id="2" name="Title 1">
+            <a:extLst>
+              <a:ext uri="{FF2B5EF4-FFF2-40B4-BE49-F238E27FC236}">
+                <a16:creationId xmlns:a16="http://schemas.microsoft.com/office/drawing/2014/main" id="{B9489470-2611-D79C-F44A-84B038D55570}"/>
+              </a:ext>
+            </a:extLst>
+          </p:cNvPr>
+          <p:cNvSpPr>
+            <a:spLocks noGrp="1"/>
+          </p:cNvSpPr>
+          <p:nvPr>
+            <p:ph type="title"/>
+          </p:nvPr>
+        </p:nvSpPr>
+        <p:spPr/>
+        <p:txBody>
+          <a:bodyPr/>
+          <a:lstStyle/>
+          <a:p>
+            <a:r>
+              <a:rPr lang="en-US" dirty="0" err="1"/>
+              <a:t>Aplikacija</a:t>
+            </a:r>
+            <a:endParaRPr lang="en-US" dirty="0"/>
+          </a:p>
+        </p:txBody>
+      </p:sp>
+      <p:sp>
+        <p:nvSpPr>
+          <p:cNvPr id="3" name="Content Placeholder 2">
+            <a:extLst>
+              <a:ext uri="{FF2B5EF4-FFF2-40B4-BE49-F238E27FC236}">
+                <a16:creationId xmlns:a16="http://schemas.microsoft.com/office/drawing/2014/main" id="{180CED84-9732-ADB7-6E15-D3171501A051}"/>
+              </a:ext>
+            </a:extLst>
+          </p:cNvPr>
+          <p:cNvSpPr>
+            <a:spLocks noGrp="1"/>
+          </p:cNvSpPr>
+          <p:nvPr>
+            <p:ph idx="1"/>
+          </p:nvPr>
+        </p:nvSpPr>
+        <p:spPr/>
+        <p:txBody>
+          <a:bodyPr>
+            <a:normAutofit/>
+          </a:bodyPr>
+          <a:lstStyle/>
+          <a:p>
+            <a:r>
+              <a:rPr lang="en-US" dirty="0"/>
+              <a:t>D</a:t>
+            </a:r>
+            <a:r>
+              <a:rPr lang="sr-Latn-RS" dirty="0"/>
+              <a:t> – </a:t>
+            </a:r>
+            <a:r>
+              <a:rPr lang="en-US" dirty="0" err="1"/>
+              <a:t>crtanje</a:t>
+            </a:r>
+            <a:r>
+              <a:rPr lang="en-US" dirty="0"/>
+              <a:t> </a:t>
+            </a:r>
+            <a:r>
+              <a:rPr lang="en-US" dirty="0" err="1"/>
+              <a:t>novog</a:t>
+            </a:r>
+            <a:r>
+              <a:rPr lang="en-US" dirty="0"/>
+              <a:t> </a:t>
+            </a:r>
+            <a:r>
+              <a:rPr lang="en-US" dirty="0" err="1"/>
+              <a:t>poligona</a:t>
+            </a:r>
+            <a:r>
+              <a:rPr lang="en-US" dirty="0"/>
+              <a:t>:</a:t>
+            </a:r>
+          </a:p>
+          <a:p>
+            <a:pPr lvl="1"/>
+            <a:r>
+              <a:rPr lang="en-US" sz="1800" dirty="0"/>
+              <a:t>Levi </a:t>
+            </a:r>
+            <a:r>
+              <a:rPr lang="en-US" sz="1800" dirty="0" err="1"/>
+              <a:t>klik</a:t>
+            </a:r>
+            <a:r>
+              <a:rPr lang="en-US" sz="1800" dirty="0"/>
+              <a:t> – novi vertex</a:t>
+            </a:r>
+          </a:p>
+          <a:p>
+            <a:pPr lvl="1"/>
+            <a:r>
+              <a:rPr lang="en-US" sz="1800" dirty="0" err="1"/>
+              <a:t>Desni</a:t>
+            </a:r>
+            <a:r>
+              <a:rPr lang="en-US" sz="1800" dirty="0"/>
+              <a:t> </a:t>
+            </a:r>
+            <a:r>
+              <a:rPr lang="en-US" sz="1800" dirty="0" err="1"/>
+              <a:t>klik</a:t>
+            </a:r>
+            <a:r>
+              <a:rPr lang="en-US" sz="1800" dirty="0"/>
+              <a:t> – </a:t>
+            </a:r>
+            <a:r>
+              <a:rPr lang="en-US" sz="1800" dirty="0" err="1"/>
+              <a:t>brisanje</a:t>
+            </a:r>
+            <a:r>
+              <a:rPr lang="en-US" sz="1800" dirty="0"/>
+              <a:t> </a:t>
+            </a:r>
+            <a:r>
+              <a:rPr lang="en-US" sz="1800" dirty="0" err="1"/>
+              <a:t>prethodnog</a:t>
+            </a:r>
+            <a:r>
+              <a:rPr lang="en-US" sz="1800" dirty="0"/>
+              <a:t> vertex-a</a:t>
+            </a:r>
+          </a:p>
+          <a:p>
+            <a:pPr lvl="1"/>
+            <a:r>
+              <a:rPr lang="en-US" sz="1800" dirty="0"/>
+              <a:t>Enter – Kraj </a:t>
+            </a:r>
+            <a:r>
+              <a:rPr lang="en-US" sz="1800" dirty="0" err="1"/>
+              <a:t>crtanja</a:t>
+            </a:r>
+            <a:r>
+              <a:rPr lang="en-US" sz="1800" dirty="0"/>
+              <a:t>, </a:t>
+            </a:r>
+            <a:r>
+              <a:rPr lang="en-US" sz="1800" dirty="0" err="1"/>
+              <a:t>prave</a:t>
+            </a:r>
+            <a:r>
+              <a:rPr lang="en-US" sz="1800" dirty="0"/>
+              <a:t> se </a:t>
+            </a:r>
+            <a:r>
+              <a:rPr lang="sr-Latn-RS" sz="1800" dirty="0"/>
+              <a:t>tačke A i B unutar </a:t>
+            </a:r>
+            <a:r>
+              <a:rPr lang="en-US" sz="1800" dirty="0" err="1"/>
+              <a:t>nacrtanog</a:t>
+            </a:r>
+            <a:r>
+              <a:rPr lang="en-US" sz="1800" dirty="0"/>
+              <a:t> </a:t>
+            </a:r>
+            <a:r>
+              <a:rPr lang="en-US" sz="1800" dirty="0" err="1"/>
+              <a:t>poligona</a:t>
+            </a:r>
+            <a:r>
+              <a:rPr lang="sr-Latn-RS" sz="1800" dirty="0"/>
+              <a:t> nasumično</a:t>
+            </a:r>
+          </a:p>
+          <a:p>
+            <a:pPr lvl="1"/>
+            <a:endParaRPr lang="sr-Latn-RS" dirty="0"/>
+          </a:p>
+        </p:txBody>
+      </p:sp>
+    </p:spTree>
+    <p:extLst>
+      <p:ext uri="{BB962C8B-B14F-4D97-AF65-F5344CB8AC3E}">
+        <p14:creationId xmlns:p14="http://schemas.microsoft.com/office/powerpoint/2010/main" val="863888277"/>
       </p:ext>
     </p:extLst>
   </p:cSld>
